--- a/HotSpot_Sentinels_Submission.pptx
+++ b/HotSpot_Sentinels_Submission.pptx
@@ -7057,7 +7057,7 @@
                 <a:cs typeface="Google Sans Flex"/>
                 <a:sym typeface="Google Sans Flex"/>
               </a:rPr>
-              <a:t>Team name: [FILL IN]</a:t>
+              <a:t>Team name: HotSpot Sentinels</a:t>
             </a:r>
             <a:endParaRPr sz="1800">
               <a:latin typeface="Google Sans Flex"/>
@@ -7085,7 +7085,7 @@
                 <a:cs typeface="Google Sans Flex"/>
                 <a:sym typeface="Google Sans Flex"/>
               </a:rPr>
-              <a:t>Team leader name: [FILL IN]</a:t>
+              <a:t>Team leader name: Debabrata Hazra   |   Team members: Debabrata Hazra, Deepthi Konda</a:t>
             </a:r>
             <a:endParaRPr sz="1800">
               <a:latin typeface="Google Sans Flex"/>
@@ -7462,8 +7462,8 @@
         </p:nvSpPr>
         <p:spPr>
           <a:xfrm>
-            <a:off x="-29250" y="5071875"/>
-            <a:ext cx="9173400" cy="97800"/>
+            <a:off x="-29250" y="5152071"/>
+            <a:ext cx="9173400" cy="17604"/>
           </a:xfrm>
           <a:prstGeom prst="rect">
             <a:avLst/>
@@ -7481,7 +7481,7 @@
           </a:bodyPr>
           <a:lstStyle/>
           <a:p>
-            <a:pPr indent="0" marL="0" rtl="0" algn="ctr">
+            <a:pPr indent="0" lvl="0" marL="0" rtl="0" algn="ctr">
               <a:spcBef>
                 <a:spcPts val="0"/>
               </a:spcBef>
@@ -7491,59 +7491,10 @@
               <a:buNone/>
             </a:pPr>
             <a:r>
-              <a:rPr sz="1300" b="1"/>
-              <a:t>[INSERT SCREENSHOTS]</a:t>
+              <a:rPr sz="1100"/>
+              <a:t>Live analysis of Singapore Port Terminal from Google satellite imagery: HVI 9.1 CRITICAL, 100% asphalt, 0% canopy, ambient 31.0 °C measured from NOAA GSOD, and the Pub/Sub alert already visible to citizens on the public wall.</a:t>
             </a:r>
             <a:endParaRPr/>
-          </a:p>
-          <a:p>
-            <a:pPr/>
-            <a:r>
-              <a:rPr sz="1300" b="0"/>
-              <a:t>Suggested captures from the live dashboard:</a:t>
-            </a:r>
-          </a:p>
-          <a:p>
-            <a:pPr lvl="1"/>
-            <a:r>
-              <a:rPr sz="1300" b="0"/>
-              <a:t>1. Dashboard landing view with the analysis controls</a:t>
-            </a:r>
-          </a:p>
-          <a:p>
-            <a:pPr lvl="1"/>
-            <a:r>
-              <a:rPr sz="1300" b="0"/>
-              <a:t>2. A CRITICAL result — HVI gauge, risk badge and the Pub/Sub alert banner</a:t>
-            </a:r>
-          </a:p>
-          <a:p>
-            <a:pPr lvl="1"/>
-            <a:r>
-              <a:rPr sz="1300" b="0"/>
-              <a:t>3. The surface-material breakdown chart</a:t>
-            </a:r>
-          </a:p>
-          <a:p>
-            <a:pPr lvl="1"/>
-            <a:r>
-              <a:rPr sz="1300" b="0"/>
-              <a:t>4. The passive-cooling blueprint with metric quantities</a:t>
-            </a:r>
-          </a:p>
-          <a:p>
-            <a:pPr lvl="1"/>
-            <a:r>
-              <a:rPr sz="1300" b="0"/>
-              <a:t>5. The LOW-risk contrast result for comparison</a:t>
-            </a:r>
-          </a:p>
-          <a:p>
-            <a:pPr/>
-            <a:r>
-              <a:rPr sz="1300" b="0"/>
-              <a:t>Live dashboard: https://hotspot-frontend-153692178986.asia-southeast1.run.app</a:t>
-            </a:r>
           </a:p>
         </p:txBody>
       </p:sp>
@@ -7599,6 +7550,30 @@
           </a:p>
         </p:txBody>
       </p:sp>
+      <p:pic>
+        <p:nvPicPr>
+          <p:cNvPr id="136" name="Picture 135" descr="montage-prototype.png"/>
+          <p:cNvPicPr>
+            <a:picLocks noChangeAspect="1"/>
+          </p:cNvPicPr>
+          <p:nvPr/>
+        </p:nvPicPr>
+        <p:blipFill>
+          <a:blip r:embed="rId5"/>
+          <a:stretch>
+            <a:fillRect/>
+          </a:stretch>
+        </p:blipFill>
+        <p:spPr>
+          <a:xfrm>
+            <a:off x="4489487" y="5071875"/>
+            <a:ext cx="135925" cy="80196"/>
+          </a:xfrm>
+          <a:prstGeom prst="rect">
+            <a:avLst/>
+          </a:prstGeom>
+        </p:spPr>
+      </p:pic>
     </p:spTree>
   </p:cSld>
   <p:clrMapOvr>
@@ -7716,58 +7691,86 @@
               <a:buNone/>
             </a:pPr>
             <a:r>
-              <a:rPr sz="1300" b="1"/>
-              <a:t>Measured against the deployed stack, not estimated</a:t>
+              <a:rPr sz="1100" b="1"/>
+              <a:t>Measured against the deployed stack on 2026-10-13, not estimated</a:t>
             </a:r>
             <a:endParaRPr/>
           </a:p>
           <a:p>
             <a:pPr/>
             <a:r>
-              <a:rPr sz="1300" b="0"/>
-              <a:t>Analysis latency — 15.6 s for an uploaded image; 13.5 s for a coordinate (coordinate also fetches and renders satellite imagery)</a:t>
+              <a:rPr sz="1100" b="0"/>
+              <a:t>Latency — 17.2 s for an uploaded image, 13.3 s for a coordinate (which also fetches and renders satellite imagery). Cold start 17.8 s, close to warm.</a:t>
             </a:r>
           </a:p>
           <a:p>
             <a:pPr/>
             <a:r>
-              <a:rPr sz="1300" b="0"/>
-              <a:t>Representative results — industrial district: HVI 8.1 CRITICAL, alert published. Botanic Gardens: HVI 1.5 LOW, no alert. Same pipeline, same model.</a:t>
+              <a:rPr sz="1100" b="0"/>
+              <a:t>Representative results, each reproduced on three consecutive runs:</a:t>
+            </a:r>
+          </a:p>
+          <a:p>
+            <a:pPr lvl="1"/>
+            <a:r>
+              <a:rPr sz="1100" b="0"/>
+              <a:t>Singapore Port Terminal — HVI 9.1 CRITICAL, 100% asphalt, alert published</a:t>
+            </a:r>
+          </a:p>
+          <a:p>
+            <a:pPr lvl="1"/>
+            <a:r>
+              <a:rPr sz="1100" b="0"/>
+              <a:t>Industrial district upload — HVI 8.6 CRITICAL, 2% canopy, alert published</a:t>
+            </a:r>
+          </a:p>
+          <a:p>
+            <a:pPr lvl="1"/>
+            <a:r>
+              <a:rPr sz="1100" b="0"/>
+              <a:t>Singapore Botanic Gardens — HVI 1.5 LOW, 100% canopy, no alert</a:t>
             </a:r>
           </a:p>
           <a:p>
             <a:pPr/>
             <a:r>
-              <a:rPr sz="1300" b="0"/>
+              <a:rPr sz="1100" b="0"/>
               <a:t>Climate grounding — live NOAA GSOD telemetry at 31.0 °C via BigQuery</a:t>
             </a:r>
           </a:p>
           <a:p>
             <a:pPr/>
             <a:r>
-              <a:rPr sz="1300" b="0"/>
-              <a:t>Quality — 686 automated tests, all offline; 98.2% backend coverage with no file below a 70% floor; 0 open P0 defects</a:t>
+              <a:rPr sz="1100" b="0"/>
+              <a:t>Quality — 812 automated tests, all offline; 96% backend coverage with no file below a 70% floor; 0 open P0 defects</a:t>
             </a:r>
           </a:p>
           <a:p>
             <a:pPr/>
             <a:r>
-              <a:rPr sz="1300" b="0"/>
+              <a:rPr sz="1100" b="0"/>
               <a:t>Reliability — /api/health reports gemini, firestore, pubsub and bigquery independently; all four ready in production</a:t>
             </a:r>
           </a:p>
           <a:p>
             <a:pPr/>
             <a:r>
-              <a:rPr sz="1300" b="0"/>
-              <a:t>Security — no service-account key files; the Maps API key is mounted from Secret Manager, never exposed as an environment variable; gitleaks scans every push</a:t>
+              <a:rPr sz="1100" b="0"/>
+              <a:t>Safety — uploads that are not JPEG or PNG are rejected 415, including files disguised with an image content type; oversized uploads are rejected 413 before any model spend</a:t>
             </a:r>
           </a:p>
           <a:p>
             <a:pPr/>
             <a:r>
-              <a:rPr sz="1300" b="0"/>
-              <a:t>Delivery — five required CI checks gate every merge; a version tag deploys both services keylessly and verifies each one separately</a:t>
+              <a:rPr sz="1100" b="0"/>
+              <a:t>Security — no service-account key files anywhere; the Maps key is mounted from Secret Manager, never an environment variable; gitleaks scans every push</a:t>
+            </a:r>
+          </a:p>
+          <a:p>
+            <a:pPr/>
+            <a:r>
+              <a:rPr sz="1100" b="0"/>
+              <a:t>Delivery — five required CI checks gate every merge; a version tag deploys both services keylessly and verifies each separately</a:t>
             </a:r>
           </a:p>
         </p:txBody>
@@ -7941,58 +7944,100 @@
               <a:buNone/>
             </a:pPr>
             <a:r>
-              <a:rPr sz="1300" b="1"/>
+              <a:rPr sz="1100" b="1"/>
+              <a:t>Engineering challenges met</a:t>
+            </a:r>
+            <a:endParaRPr/>
+          </a:p>
+          <a:p>
+            <a:pPr lvl="1"/>
+            <a:r>
+              <a:rPr sz="1100" b="0"/>
+              <a:t>A generative model will not reliably return parseable JSON on its own. The analyser pins a response schema and the backend refuses a non-conforming payload rather than showing a malformed report.</a:t>
+            </a:r>
+          </a:p>
+          <a:p>
+            <a:pPr lvl="1"/>
+            <a:r>
+              <a:rPr sz="1100" b="0"/>
+              <a:t>Cloud Run scales to zero, so an in-process imagery cache died with the container. Moving it to Cloud Storage made imagery survive scale-to-zero and be shared across instances.</a:t>
+            </a:r>
+          </a:p>
+          <a:p>
+            <a:pPr lvl="1"/>
+            <a:r>
+              <a:rPr sz="1100" b="0"/>
+              <a:t>A map click could not write the coordinate inputs, because Streamlit forbids writing a widget key after that widget exists. The click is deferred and applied on the next run, before any widget is created.</a:t>
+            </a:r>
+          </a:p>
+          <a:p>
+            <a:pPr lvl="1"/>
+            <a:r>
+              <a:rPr sz="1100" b="0"/>
+              <a:t>Google answers 200 with a Plus Code and no country over open water, not ZERO_RESULTS. That absent country became the signal for naming a point at sea.</a:t>
+            </a:r>
+          </a:p>
+          <a:p>
+            <a:pPr/>
+            <a:r>
+              <a:rPr sz="1100" b="1"/>
               <a:t>Known limitations, stated plainly</a:t>
             </a:r>
-            <a:endParaRPr/>
           </a:p>
           <a:p>
             <a:pPr lvl="1"/>
             <a:r>
-              <a:rPr sz="1300" b="0"/>
-              <a:t>A scan does not yet store the object URI of the exact image it analysed; durable imagery storage exists, the record linkage does not.</a:t>
+              <a:rPr sz="1100" b="0"/>
+              <a:t>HVI is model-inferred, so scores vary slightly between runs. It is a triage tool that says where to survey first; it does not replace the survey.</a:t>
             </a:r>
           </a:p>
           <a:p>
             <a:pPr lvl="1"/>
             <a:r>
-              <a:rPr sz="1300" b="0"/>
-              <a:t>HVI is model-inferred, so scores vary slightly between runs rather than being deterministic.</a:t>
+              <a:rPr sz="1100" b="0"/>
+              <a:t>Given an image with no location metadata the model guesses coordinates, and can guess wrong. The report labels those fields inferred rather than presenting them as fact.</a:t>
+            </a:r>
+          </a:p>
+          <a:p>
+            <a:pPr lvl="1"/>
+            <a:r>
+              <a:rPr sz="1100" b="0"/>
+              <a:t>A scan does not yet store the object URI of the exact image it analysed.</a:t>
             </a:r>
           </a:p>
           <a:p>
             <a:pPr/>
             <a:r>
-              <a:rPr sz="1300" b="1"/>
+              <a:rPr sz="1100" b="1"/>
               <a:t>Future development</a:t>
             </a:r>
           </a:p>
           <a:p>
             <a:pPr lvl="1"/>
             <a:r>
-              <a:rPr sz="1300" b="0"/>
-              <a:t>Time-series tracking per zone to measure whether an intervention actually worked</a:t>
+              <a:rPr sz="1100" b="0"/>
+              <a:t>Time-series tracking per zone, to measure whether an intervention actually worked</a:t>
             </a:r>
           </a:p>
           <a:p>
             <a:pPr lvl="1"/>
             <a:r>
-              <a:rPr sz="1300" b="0"/>
-              <a:t>Batch analysis across a whole city grid, ranked by intervention impact per dollar</a:t>
+              <a:rPr sz="1100" b="0"/>
+              <a:t>Batch analysis across a whole city grid, ranked by cooling impact per dollar</a:t>
             </a:r>
           </a:p>
           <a:p>
             <a:pPr lvl="1"/>
             <a:r>
-              <a:rPr sz="1300" b="0"/>
-              <a:t>Cost modelling attached to the cooling blueprint for direct procurement use</a:t>
+              <a:rPr sz="1100" b="0"/>
+              <a:t>Cost modelling attached to the blueprint for direct procurement use</a:t>
             </a:r>
           </a:p>
           <a:p>
             <a:pPr lvl="1"/>
             <a:r>
-              <a:rPr sz="1300" b="0"/>
-              <a:t>Dashboards for citizens, not just planners, to surface neighbourhood-level risk</a:t>
+              <a:rPr sz="1100" b="0"/>
+              <a:t>Local-language citizen alerts, and routing to heat shelters during a heatwave</a:t>
             </a:r>
           </a:p>
         </p:txBody>
@@ -8166,7 +8211,7 @@
               <a:buNone/>
             </a:pPr>
             <a:r>
-              <a:rPr sz="1300" b="1"/>
+              <a:rPr sz="1100" b="1"/>
               <a:t>GitHub Public Repository</a:t>
             </a:r>
             <a:endParaRPr/>
@@ -8174,49 +8219,63 @@
           <a:p>
             <a:pPr lvl="1"/>
             <a:r>
-              <a:rPr sz="1300" b="0"/>
+              <a:rPr sz="1100" b="0"/>
               <a:t>https://github.com/debabratahazra/hotspot-sentinels</a:t>
             </a:r>
           </a:p>
           <a:p>
             <a:pPr/>
             <a:r>
-              <a:rPr sz="1300" b="1"/>
+              <a:rPr sz="1100" b="1"/>
               <a:t>Demo Video Link</a:t>
             </a:r>
           </a:p>
           <a:p>
             <a:pPr lvl="1"/>
             <a:r>
-              <a:rPr sz="1300" b="0"/>
+              <a:rPr sz="1100" b="0"/>
               <a:t>[INSERT VIDEO URL — 3 to 4 minutes, publicly accessible]</a:t>
             </a:r>
           </a:p>
           <a:p>
             <a:pPr/>
             <a:r>
-              <a:rPr sz="1300" b="1"/>
+              <a:rPr sz="1100" b="1"/>
               <a:t>Final Product Link (deployed prototype)</a:t>
             </a:r>
           </a:p>
           <a:p>
             <a:pPr lvl="1"/>
             <a:r>
-              <a:rPr sz="1300" b="0"/>
+              <a:rPr sz="1100" b="0"/>
               <a:t>https://hotspot-frontend-153692178986.asia-southeast1.run.app</a:t>
             </a:r>
           </a:p>
           <a:p>
             <a:pPr/>
             <a:r>
-              <a:rPr sz="1300" b="1"/>
+              <a:rPr sz="1100" b="1"/>
+              <a:t>Public alert wall (live, no sign-in)</a:t>
+            </a:r>
+          </a:p>
+          <a:p>
+            <a:pPr lvl="1"/>
+            <a:r>
+              <a:rPr sz="1100" b="0"/>
+              <a:t>https://hotspot-sentinels-7364.web.app</a:t>
+            </a:r>
+          </a:p>
+          <a:p>
+            <a:pPr/>
+            <a:r>
+              <a:rPr sz="1100" b="1"/>
               <a:t>Backend API (health check)</a:t>
             </a:r>
           </a:p>
           <a:p>
             <a:pPr lvl="1"/>
             <a:r>
-              <a:rPr sz="1300" b="0"/>
+              <a:rPr sz="1100" b="0"/>
               <a:t>https://hotspot-backend-153692178986.asia-southeast1.run.app/api/health</a:t>
             </a:r>
           </a:p>
@@ -8949,7 +9008,7 @@
             </a:pPr>
             <a:r>
               <a:rPr sz="1300" b="1"/>
-              <a:t>HotSpot Sentinels turns ordinary aerial or satellite imagery into an actionable urban-heat retrofit plan.</a:t>
+              <a:t>Heat is the deadliest weather there is, and cities make it worse. Dark roofs and asphalt turn a neighbourhood into an oven several degrees hotter than the land around it.</a:t>
             </a:r>
             <a:endParaRPr/>
           </a:p>
@@ -8957,35 +9016,49 @@
             <a:pPr/>
             <a:r>
               <a:rPr sz="1300" b="0"/>
-              <a:t>Upload a district image, or simply name a coordinate. The system returns:</a:t>
+              <a:t>That heat kills the elderly and the outdoor poor, pushes street animals and urban wildlife out of their range, and forces air-conditioning demand that burns more carbon — which makes the next summer hotter still.</a:t>
+            </a:r>
+          </a:p>
+          <a:p>
+            <a:pPr/>
+            <a:r>
+              <a:rPr sz="1300" b="0"/>
+              <a:t>The barrier is not willingness. It is that nobody can point at one city block and say how bad this one is, and what exactly to do about it.</a:t>
+            </a:r>
+          </a:p>
+          <a:p>
+            <a:pPr/>
+            <a:r>
+              <a:rPr sz="1300" b="1"/>
+              <a:t>HotSpot Sentinels answers both in about fifteen seconds:</a:t>
             </a:r>
           </a:p>
           <a:p>
             <a:pPr lvl="1"/>
             <a:r>
               <a:rPr sz="1300" b="0"/>
-              <a:t>A 0–10 Heat Vulnerability Index (HVI) with a risk band</a:t>
+              <a:t>A 0–10 Heat Vulnerability Index with a risk band</a:t>
             </a:r>
           </a:p>
           <a:p>
             <a:pPr lvl="1"/>
             <a:r>
               <a:rPr sz="1300" b="0"/>
-              <a:t>The surface-material breakdown driving that score — asphalt, dark roof, concrete, canopy</a:t>
+              <a:t>The surface materials driving that score — asphalt, dark roof, concrete, canopy</a:t>
             </a:r>
           </a:p>
           <a:p>
             <a:pPr lvl="1"/>
             <a:r>
               <a:rPr sz="1300" b="0"/>
-              <a:t>A passive-cooling blueprint: wind-corridor orientation, retroreflective coating area in m², and projected surface temperature drop in °C</a:t>
+              <a:t>A passive-cooling blueprint with quantities: corridor orientation, retroreflective coating in m², projected temperature drop in °C</a:t>
             </a:r>
           </a:p>
           <a:p>
             <a:pPr/>
             <a:r>
               <a:rPr sz="1300" b="0"/>
-              <a:t>When a zone scores CRITICAL, an alert is published automatically so the right team hears about it without anyone watching a dashboard.</a:t>
+              <a:t>When a zone scores CRITICAL it publishes a public alert automatically, so residents learn their street is dangerous without needing access to a planning dashboard.</a:t>
             </a:r>
           </a:p>
         </p:txBody>
@@ -9159,58 +9232,65 @@
               <a:buNone/>
             </a:pPr>
             <a:r>
-              <a:rPr sz="1300" b="1"/>
+              <a:rPr sz="1100" b="1"/>
+              <a:t>Why this matters — environment, people, animals</a:t>
+            </a:r>
+            <a:endParaRPr/>
+          </a:p>
+          <a:p>
+            <a:pPr lvl="1"/>
+            <a:r>
+              <a:rPr sz="1100" b="0"/>
+              <a:t>Measured on the live system: a block at 2% tree canopy scores 8.6 CRITICAL; a park at 100% canopy scores 1.5 LOW. Same model, same pipeline. That gap is exactly what tree cover and reflective surfaces buy a city.</a:t>
+            </a:r>
+          </a:p>
+          <a:p>
+            <a:pPr lvl="1"/>
+            <a:r>
+              <a:rPr sz="1100" b="0"/>
+              <a:t>The blueprint for one CRITICAL zone projects an 8–10 °C surface temperature drop — the difference between a heatwave that is survivable and one that is not, and a direct cut in cooling energy demand.</a:t>
+            </a:r>
+          </a:p>
+          <a:p>
+            <a:pPr lvl="1"/>
+            <a:r>
+              <a:rPr sz="1100" b="0"/>
+              <a:t>Cooler blocks mean habitable shade for street animals and urban wildlife, not only comfort for people indoors.</a:t>
+            </a:r>
+          </a:p>
+          <a:p>
+            <a:pPr/>
+            <a:r>
+              <a:rPr sz="1100" b="1"/>
               <a:t>How it differs from existing ideas</a:t>
             </a:r>
-            <a:endParaRPr/>
           </a:p>
           <a:p>
             <a:pPr lvl="1"/>
             <a:r>
-              <a:rPr sz="1300" b="0"/>
-              <a:t>Most heat-island tools stop at a map that shows where it is hot. This one explains why — which surfaces cause it — and prescribes what to change, with quantities.</a:t>
+              <a:rPr sz="1100" b="0"/>
+              <a:t>Most heat-island tools stop at a map showing where it is hot. This explains why — which surfaces cause it — and prescribes what to change, with quantities.</a:t>
             </a:r>
           </a:p>
           <a:p>
             <a:pPr lvl="1"/>
             <a:r>
-              <a:rPr sz="1300" b="0"/>
-              <a:t>No specialist thermal or LiDAR capture needed. It reads ordinary RGB imagery, so any city with satellite coverage can use it today.</a:t>
+              <a:rPr sz="1100" b="0"/>
+              <a:t>No thermal or LiDAR capture needed. It reads ordinary RGB imagery, so any city with satellite coverage can start today, including ones that cannot fund a survey.</a:t>
             </a:r>
           </a:p>
           <a:p>
             <a:pPr/>
             <a:r>
-              <a:rPr sz="1300" b="1"/>
-              <a:t>How it solves the problem</a:t>
+              <a:rPr sz="1100" b="1"/>
+              <a:t>USP</a:t>
             </a:r>
           </a:p>
           <a:p>
             <a:pPr lvl="1"/>
             <a:r>
-              <a:rPr sz="1300" b="0"/>
-              <a:t>Planners get a costed, specific intervention per zone instead of a heat map they must interpret themselves.</a:t>
-            </a:r>
-          </a:p>
-          <a:p>
-            <a:pPr lvl="1"/>
-            <a:r>
-              <a:rPr sz="1300" b="0"/>
-              <a:t>Measured surface temperature is grounded in live NOAA climate telemetry, not assumed.</a:t>
-            </a:r>
-          </a:p>
-          <a:p>
-            <a:pPr/>
-            <a:r>
-              <a:rPr sz="1300" b="1"/>
-              <a:t>USP</a:t>
-            </a:r>
-          </a:p>
-          <a:p>
-            <a:pPr lvl="1"/>
-            <a:r>
-              <a:rPr sz="1300" b="0"/>
-              <a:t>Image in, retrofit plan out, in about 15 seconds — with a machine-readable contract so the output can feed procurement or GIS systems directly.</a:t>
+              <a:rPr sz="1100" b="0"/>
+              <a:t>Image or place name in, costed retrofit plan out, in about fifteen seconds — with a machine-readable contract that can feed procurement or GIS directly.</a:t>
             </a:r>
           </a:p>
         </p:txBody>
@@ -9516,62 +9596,111 @@
               <a:buNone/>
             </a:pPr>
             <a:r>
+              <a:rPr sz="1100" b="1"/>
+              <a:t>Analyse anywhere — four ways to choose a location</a:t>
+            </a:r>
+            <a:endParaRPr/>
+          </a:p>
+          <a:p>
+            <a:pPr lvl="1"/>
+            <a:r>
               <a:rPr sz="1100" b="0"/>
-              <a:t>Dual input: upload an aerial image, or analyse any coordinate from live satellite imagery</a:t>
-            </a:r>
-            <a:endParaRPr/>
+              <a:t>Type three characters and pick from live Google Places suggestions, down to neighbourhood level; click any point on a world map; use a preset; or paste coordinates</a:t>
+            </a:r>
+          </a:p>
+          <a:p>
+            <a:pPr lvl="1"/>
+            <a:r>
+              <a:rPr sz="1100" b="0"/>
+              <a:t>A clicked point is named automatically — city and country on land, or the sea or ocean at sea</a:t>
+            </a:r>
           </a:p>
           <a:p>
             <a:pPr/>
+            <a:r>
+              <a:rPr sz="1100" b="1"/>
+              <a:t>Analysis</a:t>
+            </a:r>
+          </a:p>
+          <a:p>
+            <a:pPr lvl="1"/>
+            <a:r>
+              <a:rPr sz="1100" b="0"/>
+              <a:t>Upload an aerial image, or analyse a coordinate from live Google satellite imagery</a:t>
+            </a:r>
+          </a:p>
+          <a:p>
+            <a:pPr lvl="1"/>
             <a:r>
               <a:rPr sz="1100" b="0"/>
               <a:t>0–10 Heat Vulnerability Index with LOW / MODERATE / HIGH / CRITICAL banding</a:t>
             </a:r>
           </a:p>
           <a:p>
-            <a:pPr/>
+            <a:pPr lvl="1"/>
             <a:r>
               <a:rPr sz="1100" b="0"/>
               <a:t>Surface-material breakdown that always totals 100%</a:t>
             </a:r>
           </a:p>
           <a:p>
+            <a:pPr lvl="1"/>
+            <a:r>
+              <a:rPr sz="1100" b="0"/>
+              <a:t>Passive-cooling blueprint in metric units — m², °C, corridor orientation</a:t>
+            </a:r>
+          </a:p>
+          <a:p>
+            <a:pPr lvl="1"/>
+            <a:r>
+              <a:rPr sz="1100" b="0"/>
+              <a:t>Live ambient temperature from NOAA GSOD via BigQuery, with an offline fallback</a:t>
+            </a:r>
+          </a:p>
+          <a:p>
             <a:pPr/>
             <a:r>
-              <a:rPr sz="1100" b="0"/>
-              <a:t>Passive-cooling blueprint with metric quantities — m², °C, corridor orientation</a:t>
-            </a:r>
-          </a:p>
-          <a:p>
-            <a:pPr/>
-            <a:r>
-              <a:rPr sz="1100" b="0"/>
-              <a:t>Live ambient temperature from the NOAA GSOD public dataset, with an offline fallback</a:t>
-            </a:r>
-          </a:p>
-          <a:p>
-            <a:pPr/>
+              <a:rPr sz="1100" b="1"/>
+              <a:t>Reaching people</a:t>
+            </a:r>
+          </a:p>
+          <a:p>
+            <a:pPr lvl="1"/>
             <a:r>
               <a:rPr sz="1100" b="0"/>
               <a:t>Automatic Pub/Sub alert the moment a zone is CRITICAL</a:t>
             </a:r>
           </a:p>
           <a:p>
+            <a:pPr lvl="1"/>
+            <a:r>
+              <a:rPr sz="1100" b="0"/>
+              <a:t>Public alert wall on Firebase Hosting — citizens see critical zones appear live, while operator scan data stays private</a:t>
+            </a:r>
+          </a:p>
+          <a:p>
+            <a:pPr lvl="1"/>
+            <a:r>
+              <a:rPr sz="1100" b="0"/>
+              <a:t>City-wide map of every analysed zone coloured by risk: a retrofit queue ordered worst-first</a:t>
+            </a:r>
+          </a:p>
+          <a:p>
             <a:pPr/>
             <a:r>
+              <a:rPr sz="1100" b="1"/>
+              <a:t>Trustworthiness</a:t>
+            </a:r>
+          </a:p>
+          <a:p>
+            <a:pPr lvl="1"/>
+            <a:r>
               <a:rPr sz="1100" b="0"/>
-              <a:t>Persistent scan history, queryable through the API</a:t>
-            </a:r>
-          </a:p>
-          <a:p>
-            <a:pPr/>
-            <a:r>
-              <a:rPr sz="1100" b="0"/>
-              <a:t>Health endpoint reporting every dependency independently</a:t>
-            </a:r>
-          </a:p>
-          <a:p>
-            <a:pPr/>
+              <a:t>Every identity field is labelled supplied or inferred, so a planner knows which numbers the model guessed</a:t>
+            </a:r>
+          </a:p>
+          <a:p>
+            <a:pPr lvl="1"/>
             <a:r>
               <a:rPr sz="1100" b="0"/>
               <a:t>Graceful degradation: a failed alert or climate lookup never fails the analysis</a:t>
@@ -9719,8 +9848,8 @@
         </p:nvSpPr>
         <p:spPr>
           <a:xfrm>
-            <a:off x="-29250" y="5071875"/>
-            <a:ext cx="9173400" cy="97800"/>
+            <a:off x="-29250" y="5152071"/>
+            <a:ext cx="9173400" cy="17604"/>
           </a:xfrm>
           <a:prstGeom prst="rect">
             <a:avLst/>
@@ -9738,7 +9867,7 @@
           </a:bodyPr>
           <a:lstStyle/>
           <a:p>
-            <a:pPr indent="0" marL="0" rtl="0" algn="ctr">
+            <a:pPr indent="0" lvl="0" marL="0" rtl="0" algn="ctr">
               <a:spcBef>
                 <a:spcPts val="0"/>
               </a:spcBef>
@@ -9748,66 +9877,10 @@
               <a:buNone/>
             </a:pPr>
             <a:r>
-              <a:rPr sz="1100" b="1"/>
-              <a:t>[INSERT DIAGRAM — described below]</a:t>
+              <a:rPr sz="1100"/>
+              <a:t>Operator to retrofit plan. Steps 3-6 are independent: a failed alert or climate lookup degrades the report, it never fails the analysis.</a:t>
             </a:r>
             <a:endParaRPr/>
-          </a:p>
-          <a:p>
-            <a:pPr/>
-            <a:r>
-              <a:rPr sz="1100" b="0"/>
-              <a:t>1. Operator uploads an image or selects a coordinate in the Streamlit dashboard</a:t>
-            </a:r>
-          </a:p>
-          <a:p>
-            <a:pPr/>
-            <a:r>
-              <a:rPr sz="1100" b="0"/>
-              <a:t>2. Dashboard POSTs to /api/analyze on the FastAPI service (Cloud Run)</a:t>
-            </a:r>
-          </a:p>
-          <a:p>
-            <a:pPr/>
-            <a:r>
-              <a:rPr sz="1100" b="0"/>
-              <a:t>3. For a coordinate, the backend fetches attributed satellite imagery from the Maps Static API and shares it via Cloud Storage so any instance can serve it</a:t>
-            </a:r>
-          </a:p>
-          <a:p>
-            <a:pPr/>
-            <a:r>
-              <a:rPr sz="1100" b="0"/>
-              <a:t>4. BigQuery returns live NOAA GSOD ambient temperature for the location</a:t>
-            </a:r>
-          </a:p>
-          <a:p>
-            <a:pPr/>
-            <a:r>
-              <a:rPr sz="1100" b="0"/>
-              <a:t>5. Gemini 2.5 Flash reads the imagery and returns a schema-constrained JSON report</a:t>
-            </a:r>
-          </a:p>
-          <a:p>
-            <a:pPr/>
-            <a:r>
-              <a:rPr sz="1100" b="0"/>
-              <a:t>6. The report is persisted to Firestore</a:t>
-            </a:r>
-          </a:p>
-          <a:p>
-            <a:pPr/>
-            <a:r>
-              <a:rPr sz="1100" b="0"/>
-              <a:t>7. If risk is CRITICAL, an alert is published to Pub/Sub</a:t>
-            </a:r>
-          </a:p>
-          <a:p>
-            <a:pPr/>
-            <a:r>
-              <a:rPr sz="1100" b="0"/>
-              <a:t>8. The dashboard renders the HVI gauge, surface chart and cooling blueprint</a:t>
-            </a:r>
           </a:p>
         </p:txBody>
       </p:sp>
@@ -9863,6 +9936,30 @@
           </a:p>
         </p:txBody>
       </p:sp>
+      <p:pic>
+        <p:nvPicPr>
+          <p:cNvPr id="96" name="Picture 95" descr="diagram-process-flow.png"/>
+          <p:cNvPicPr>
+            <a:picLocks noChangeAspect="1"/>
+          </p:cNvPicPr>
+          <p:nvPr/>
+        </p:nvPicPr>
+        <p:blipFill>
+          <a:blip r:embed="rId5"/>
+          <a:stretch>
+            <a:fillRect/>
+          </a:stretch>
+        </p:blipFill>
+        <p:spPr>
+          <a:xfrm>
+            <a:off x="4479881" y="5071875"/>
+            <a:ext cx="155137" cy="80196"/>
+          </a:xfrm>
+          <a:prstGeom prst="rect">
+            <a:avLst/>
+          </a:prstGeom>
+        </p:spPr>
+      </p:pic>
     </p:spTree>
   </p:cSld>
   <p:clrMapOvr>
@@ -10126,8 +10223,8 @@
         </p:nvSpPr>
         <p:spPr>
           <a:xfrm>
-            <a:off x="-29250" y="5071875"/>
-            <a:ext cx="9173400" cy="97800"/>
+            <a:off x="-29250" y="5152071"/>
+            <a:ext cx="9173400" cy="17604"/>
           </a:xfrm>
           <a:prstGeom prst="rect">
             <a:avLst/>
@@ -10145,7 +10242,7 @@
           </a:bodyPr>
           <a:lstStyle/>
           <a:p>
-            <a:pPr indent="0" marL="0" rtl="0" algn="ctr">
+            <a:pPr indent="0" lvl="0" marL="0" rtl="0" algn="ctr">
               <a:spcBef>
                 <a:spcPts val="0"/>
               </a:spcBef>
@@ -10155,66 +10252,10 @@
               <a:buNone/>
             </a:pPr>
             <a:r>
-              <a:rPr sz="1100" b="1"/>
-              <a:t>[INSERT DIAGRAM — components below]</a:t>
+              <a:rPr sz="1100"/>
+              <a:t>Two containers on Cloud Run in asia-southeast1. The Maps key is mounted from Secret Manager and proxied by the backend, so it never reaches a browser.</a:t>
             </a:r>
             <a:endParaRPr/>
-          </a:p>
-          <a:p>
-            <a:pPr/>
-            <a:r>
-              <a:rPr sz="1100" b="0"/>
-              <a:t>Frontend — Streamlit on Cloud Run (asia-southeast1), its own container</a:t>
-            </a:r>
-          </a:p>
-          <a:p>
-            <a:pPr/>
-            <a:r>
-              <a:rPr sz="1100" b="0"/>
-              <a:t>Backend — FastAPI on Cloud Run, the only HTTP layer; async orchestration</a:t>
-            </a:r>
-          </a:p>
-          <a:p>
-            <a:pPr/>
-            <a:r>
-              <a:rPr sz="1100" b="0"/>
-              <a:t>AI — Gemini 2.5 Flash via the google-genai SDK, structured JSON response schema</a:t>
-            </a:r>
-          </a:p>
-          <a:p>
-            <a:pPr/>
-            <a:r>
-              <a:rPr sz="1100" b="0"/>
-              <a:t>Data — Firestore (scan records) · BigQuery (NOAA GSOD) · Cloud Storage (shared imagery cache)</a:t>
-            </a:r>
-          </a:p>
-          <a:p>
-            <a:pPr/>
-            <a:r>
-              <a:rPr sz="1100" b="0"/>
-              <a:t>Messaging — Pub/Sub topic for CRITICAL alerts</a:t>
-            </a:r>
-          </a:p>
-          <a:p>
-            <a:pPr/>
-            <a:r>
-              <a:rPr sz="1100" b="0"/>
-              <a:t>Secrets — Secret Manager; the Maps key is mounted, never an environment variable</a:t>
-            </a:r>
-          </a:p>
-          <a:p>
-            <a:pPr/>
-            <a:r>
-              <a:rPr sz="1100" b="0"/>
-              <a:t>Identity — one runtime service account with six narrow roles and zero key files</a:t>
-            </a:r>
-          </a:p>
-          <a:p>
-            <a:pPr/>
-            <a:r>
-              <a:rPr sz="1100" b="0"/>
-              <a:t>Delivery — GitHub Actions; a version tag deploys both services via Workload Identity Federation</a:t>
-            </a:r>
           </a:p>
         </p:txBody>
       </p:sp>
@@ -10270,6 +10311,30 @@
           </a:p>
         </p:txBody>
       </p:sp>
+      <p:pic>
+        <p:nvPicPr>
+          <p:cNvPr id="112" name="Picture 111" descr="diagram-architecture.png"/>
+          <p:cNvPicPr>
+            <a:picLocks noChangeAspect="1"/>
+          </p:cNvPicPr>
+          <p:nvPr/>
+        </p:nvPicPr>
+        <p:blipFill>
+          <a:blip r:embed="rId5"/>
+          <a:stretch>
+            <a:fillRect/>
+          </a:stretch>
+        </p:blipFill>
+        <p:spPr>
+          <a:xfrm>
+            <a:off x="4484857" y="5071875"/>
+            <a:ext cx="145185" cy="80196"/>
+          </a:xfrm>
+          <a:prstGeom prst="rect">
+            <a:avLst/>
+          </a:prstGeom>
+        </p:spPr>
+      </p:pic>
     </p:spTree>
   </p:cSld>
   <p:clrMapOvr>
@@ -10396,7 +10461,7 @@
             <a:pPr lvl="1"/>
             <a:r>
               <a:rPr sz="1100" b="0"/>
-              <a:t>Gemini 2.5 Flash (Vertex AI) — multimodal analysis with enforced JSON schema</a:t>
+              <a:t>Gemini 2.5 Flash (Vertex AI) — multimodal analysis with an enforced JSON schema</a:t>
             </a:r>
           </a:p>
           <a:p>
@@ -10410,7 +10475,7 @@
             <a:pPr lvl="1"/>
             <a:r>
               <a:rPr sz="1100" b="0"/>
-              <a:t>Firestore — Firebase's document database, Native mode; system of record for every scan</a:t>
+              <a:t>Firebase — Firestore as the system of record, Hosting for the public alert wall, and security rules making curated alerts world-readable but never writable</a:t>
             </a:r>
           </a:p>
           <a:p>
@@ -10438,7 +10503,14 @@
             <a:pPr lvl="1"/>
             <a:r>
               <a:rPr sz="1100" b="0"/>
-              <a:t>Secret Manager · Artifact Registry · Maps Static API</a:t>
+              <a:t>Maps Static, Geocoding and Places APIs — imagery, place search and reverse naming, all proxied server-side</a:t>
+            </a:r>
+          </a:p>
+          <a:p>
+            <a:pPr lvl="1"/>
+            <a:r>
+              <a:rPr sz="1100" b="0"/>
+              <a:t>Secret Manager · Artifact Registry · Cloud Build</a:t>
             </a:r>
           </a:p>
           <a:p>
@@ -10459,7 +10531,7 @@
             <a:pPr lvl="1"/>
             <a:r>
               <a:rPr sz="1100" b="0"/>
-              <a:t>GitHub Actions CI/CD with Workload Identity Federation — no service-account keys</a:t>
+              <a:t>GitHub Actions CI/CD with Workload Identity Federation — no service-account keys exist</a:t>
             </a:r>
           </a:p>
         </p:txBody>

--- a/HotSpot_Sentinels_Submission.pptx
+++ b/HotSpot_Sentinels_Submission.pptx
@@ -7492,7 +7492,7 @@
             </a:pPr>
             <a:r>
               <a:rPr sz="1100"/>
-              <a:t>Live analysis of Singapore Port Terminal from Google satellite imagery: HVI 9.1 CRITICAL, 100% asphalt, 0% canopy, ambient 31.0 °C measured from NOAA GSOD, and the Pub/Sub alert already visible to citizens on the public wall.</a:t>
+              <a:t>Live analysis of Pasir Panjang Terminal, Singapore, from Google satellite imagery: HVI 8.6 CRITICAL, 0% tree canopy, ambient 31.0 °C measured from NOAA GSOD, and the Pub/Sub alert already visible to citizens on the public wall.</a:t>
             </a:r>
             <a:endParaRPr/>
           </a:p>
@@ -7714,7 +7714,7 @@
             <a:pPr lvl="1"/>
             <a:r>
               <a:rPr sz="1100" b="0"/>
-              <a:t>Singapore Port Terminal — HVI 9.1 CRITICAL, 100% asphalt, alert published</a:t>
+              <a:t>Pasir Panjang Terminal, Singapore — HVI 8.6 CRITICAL, 0% canopy, alert published</a:t>
             </a:r>
           </a:p>
           <a:p>
@@ -7982,6 +7982,13 @@
             <a:r>
               <a:rPr sz="1100" b="1"/>
               <a:t>Known limitations, stated plainly</a:t>
+            </a:r>
+          </a:p>
+          <a:p>
+            <a:pPr lvl="1"/>
+            <a:r>
+              <a:rPr sz="1100" b="0"/>
+              <a:t>The model has no concept of water. Pointed at open sea it reads the dark surface as asphalt and scores it CRITICAL. Found by fetching the imagery for a shipping lane and looking at it; the shipped presets are now all verified land, but a user can still click the ocean. A water check is the next thing to build.</a:t>
             </a:r>
           </a:p>
           <a:p>

--- a/HotSpot_Sentinels_Submission.pptx
+++ b/HotSpot_Sentinels_Submission.pptx
@@ -7692,7 +7692,7 @@
             </a:pPr>
             <a:r>
               <a:rPr sz="1100" b="1"/>
-              <a:t>Measured against the deployed stack on 2026-10-13, not estimated</a:t>
+              <a:t>Measured against the deployed stack on 2026-10-14, not estimated</a:t>
             </a:r>
             <a:endParaRPr/>
           </a:p>
@@ -7700,7 +7700,7 @@
             <a:pPr/>
             <a:r>
               <a:rPr sz="1100" b="0"/>
-              <a:t>Latency — 17.2 s for an uploaded image, 13.3 s for a coordinate (which also fetches and renders satellite imagery). Cold start 17.8 s, close to warm.</a:t>
+              <a:t>Latency — 21.6 s for the container-terminal coordinate, 12.6 s for the park, 17.2 s for an uploaded image. Coordinates also fetch and render satellite imagery. Cold start is now close to warm.</a:t>
             </a:r>
           </a:p>
           <a:p>
@@ -7721,7 +7721,7 @@
             <a:pPr lvl="1"/>
             <a:r>
               <a:rPr sz="1100" b="0"/>
-              <a:t>Industrial district upload — HVI 8.6 CRITICAL, 2% canopy, alert published</a:t>
+              <a:t>Old Dhaka — HVI 8.5 CRITICAL, 0% canopy · Kolkata — 8.2 · Manila — 8.1</a:t>
             </a:r>
           </a:p>
           <a:p>
@@ -7742,7 +7742,7 @@
             <a:pPr/>
             <a:r>
               <a:rPr sz="1100" b="0"/>
-              <a:t>Quality — 812 automated tests, all offline; 96% backend coverage with no file below a 70% floor; 0 open P0 defects</a:t>
+              <a:t>Quality — 815 automated tests, all offline; 96% backend coverage with no file below a 70% floor; 0 open P0 defects</a:t>
             </a:r>
           </a:p>
           <a:p>
@@ -9248,7 +9248,7 @@
             <a:pPr lvl="1"/>
             <a:r>
               <a:rPr sz="1100" b="0"/>
-              <a:t>Measured on the live system: a block at 2% tree canopy scores 8.6 CRITICAL; a park at 100% canopy scores 1.5 LOW. Same model, same pipeline. That gap is exactly what tree cover and reflective surfaces buy a city.</a:t>
+              <a:t>Measured on the live system: a container terminal at 0% tree canopy scores 8.6 CRITICAL; a national park at 100% canopy scores 1.5 LOW. Same model, same pipeline. That gap is exactly what tree cover and reflective surfaces buy a city.</a:t>
             </a:r>
           </a:p>
           <a:p>
@@ -9612,7 +9612,14 @@
             <a:pPr lvl="1"/>
             <a:r>
               <a:rPr sz="1100" b="0"/>
-              <a:t>Type three characters and pick from live Google Places suggestions, down to neighbourhood level; click any point on a world map; use a preset; or paste coordinates</a:t>
+              <a:t>A shortcut list of 15 places across Asia, ordered most built-up to most green, so the list itself runs from CRITICAL down to LOW</a:t>
+            </a:r>
+          </a:p>
+          <a:p>
+            <a:pPr lvl="1"/>
+            <a:r>
+              <a:rPr sz="1100" b="0"/>
+              <a:t>Type three characters and pick from live Google Places suggestions, down to neighbourhood level; click any point on a world map; or paste coordinates</a:t>
             </a:r>
           </a:p>
           <a:p>
@@ -9620,6 +9627,13 @@
             <a:r>
               <a:rPr sz="1100" b="0"/>
               <a:t>A clicked point is named automatically — city and country on land, or the sea or ocean at sea</a:t>
+            </a:r>
+          </a:p>
+          <a:p>
+            <a:pPr lvl="1"/>
+            <a:r>
+              <a:rPr sz="1100" b="0"/>
+              <a:t>Whichever method is used, both search boxes and the coordinate fields update together, so the screen never names one place while analysing another</a:t>
             </a:r>
           </a:p>
           <a:p>
